--- a/courses/build/ai-literacy/A-D2.zu.pptx
+++ b/courses/build/ai-literacy/A-D2.zu.pptx
@@ -1380,7 +1380,7 @@
           </a:p>
           <a:p>
             <a:r>
-              <a:t>Clip A-ANI-07: public/course-animations/market-community/watch-04-farm-record.mp4</a:t>
+              <a:t>Clip A-ANI-07: public/course-media/ai-literacy/A-ANI-07.mp4</a:t>
             </a:r>
           </a:p>
         </p:txBody>
@@ -1557,7 +1557,7 @@
           </a:p>
           <a:p>
             <a:r>
-              <a:t>Clip A-ANI-06: public/course-animations/soil-health/tour-soil-observation.mp4</a:t>
+              <a:t>Clip A-ANI-06: public/course-media/ai-literacy/A-ANI-06.mp4</a:t>
             </a:r>
           </a:p>
         </p:txBody>
@@ -1906,7 +1906,7 @@
           </a:p>
           <a:p>
             <a:r>
-              <a:t>Clip A-ANI-05: public/course-animations/reading-landscape/watch-09-sun-shadows.mp4</a:t>
+              <a:t>Clip A-ANI-05: public/course-media/ai-literacy/A-ANI-05.mp4</a:t>
             </a:r>
           </a:p>
         </p:txBody>
